--- a/Teaching/Compile Time Errrors/problem_session_2_enum_exhaustiveness.pptx
+++ b/Teaching/Compile Time Errrors/problem_session_2_enum_exhaustiveness.pptx
@@ -4,6 +4,9 @@
   <p:sldMasterIdLst>
     <p:sldMasterId id="2147483648" r:id="rId1"/>
   </p:sldMasterIdLst>
+  <p:notesMasterIdLst>
+    <p:notesMasterId r:id="rId9"/>
+  </p:notesMasterIdLst>
   <p:sldIdLst>
     <p:sldId id="256" r:id="rId2"/>
     <p:sldId id="257" r:id="rId3"/>
@@ -13,10 +16,7 @@
     <p:sldId id="261" r:id="rId7"/>
     <p:sldId id="262" r:id="rId8"/>
   </p:sldIdLst>
-  <p:notesMasterIdLst>
-    <p:notesMasterId r:id="rId9"/>
-  </p:notesMasterIdLst>
-  <p:sldSz cx="9144000" cy="5143500"/>
+  <p:sldSz cx="9144000" cy="5143500" type="screen16x9"/>
   <p:notesSz cx="5143500" cy="9144000"/>
   <p:defaultTextStyle>
     <a:lvl1pPr marL="0" algn="l" defTabSz="914400" rtl="0" eaLnBrk="1" latinLnBrk="0" hangingPunct="1">
@@ -110,7 +110,57 @@
       </a:defRPr>
     </a:lvl9pPr>
   </p:defaultTextStyle>
+  <p:extLst>
+    <p:ext uri="{EFAFB233-063F-42B5-8137-9DF3F51BA10A}">
+      <p15:sldGuideLst xmlns:p15="http://schemas.microsoft.com/office/powerpoint/2012/main"/>
+    </p:ext>
+  </p:extLst>
 </p:presentation>
+</file>
+
+<file path=ppt/changesInfos/changesInfo1.xml><?xml version="1.0" encoding="utf-8"?>
+<pc:chgInfo xmlns:a="http://schemas.openxmlformats.org/drawingml/2006/main" xmlns:r="http://schemas.openxmlformats.org/officeDocument/2006/relationships" xmlns:ac="http://schemas.microsoft.com/office/drawing/2013/main/command" xmlns:pc="http://schemas.microsoft.com/office/powerpoint/2013/main/command">
+  <pc:docChgLst>
+    <pc:chgData name="Schroeder, Matthew Q [US] (MS)" userId="979a6c1c-361c-40a6-abbd-98ea57239bae" providerId="ADAL" clId="{10E512CF-6667-42B6-800C-2BB4538ADB77}"/>
+    <pc:docChg chg="modSld">
+      <pc:chgData name="Schroeder, Matthew Q [US] (MS)" userId="979a6c1c-361c-40a6-abbd-98ea57239bae" providerId="ADAL" clId="{10E512CF-6667-42B6-800C-2BB4538ADB77}" dt="2026-01-19T20:48:48.582" v="2" actId="1076"/>
+      <pc:docMkLst>
+        <pc:docMk/>
+      </pc:docMkLst>
+      <pc:sldChg chg="modSp mod">
+        <pc:chgData name="Schroeder, Matthew Q [US] (MS)" userId="979a6c1c-361c-40a6-abbd-98ea57239bae" providerId="ADAL" clId="{10E512CF-6667-42B6-800C-2BB4538ADB77}" dt="2026-01-19T20:48:48.582" v="2" actId="1076"/>
+        <pc:sldMkLst>
+          <pc:docMk/>
+          <pc:sldMk cId="0" sldId="257"/>
+        </pc:sldMkLst>
+        <pc:spChg chg="mod">
+          <ac:chgData name="Schroeder, Matthew Q [US] (MS)" userId="979a6c1c-361c-40a6-abbd-98ea57239bae" providerId="ADAL" clId="{10E512CF-6667-42B6-800C-2BB4538ADB77}" dt="2026-01-19T20:48:33.174" v="0" actId="1076"/>
+          <ac:spMkLst>
+            <pc:docMk/>
+            <pc:sldMk cId="0" sldId="257"/>
+            <ac:spMk id="4" creationId="{00000000-0000-0000-0000-000000000000}"/>
+          </ac:spMkLst>
+        </pc:spChg>
+        <pc:spChg chg="mod">
+          <ac:chgData name="Schroeder, Matthew Q [US] (MS)" userId="979a6c1c-361c-40a6-abbd-98ea57239bae" providerId="ADAL" clId="{10E512CF-6667-42B6-800C-2BB4538ADB77}" dt="2026-01-19T20:48:48.582" v="2" actId="1076"/>
+          <ac:spMkLst>
+            <pc:docMk/>
+            <pc:sldMk cId="0" sldId="257"/>
+            <ac:spMk id="5" creationId="{00000000-0000-0000-0000-000000000000}"/>
+          </ac:spMkLst>
+        </pc:spChg>
+        <pc:spChg chg="mod">
+          <ac:chgData name="Schroeder, Matthew Q [US] (MS)" userId="979a6c1c-361c-40a6-abbd-98ea57239bae" providerId="ADAL" clId="{10E512CF-6667-42B6-800C-2BB4538ADB77}" dt="2026-01-19T20:48:41.701" v="1" actId="1076"/>
+          <ac:spMkLst>
+            <pc:docMk/>
+            <pc:sldMk cId="0" sldId="257"/>
+            <ac:spMk id="6" creationId="{00000000-0000-0000-0000-000000000000}"/>
+          </ac:spMkLst>
+        </pc:spChg>
+      </pc:sldChg>
+    </pc:docChg>
+  </pc:docChgLst>
+</pc:chgInfo>
 </file>
 
 <file path=ppt/notesMasters/notesMaster1.xml><?xml version="1.0" encoding="utf-8"?>
@@ -135,234 +185,10 @@
           <a:chExt cx="0" cy="0"/>
         </a:xfrm>
       </p:grpSpPr>
-      <p:sp>
-        <p:nvSpPr>
-          <p:cNvPr id="2" name="Header Placeholder 1"/>
-          <p:cNvSpPr>
-            <a:spLocks noGrp="1"/>
-          </p:cNvSpPr>
-          <p:nvPr>
-            <p:ph type="hdr" sz="quarter"/>
-          </p:nvPr>
-        </p:nvSpPr>
-        <p:spPr>
-          <a:xfrm>
-            <a:off x="0" y="0"/>
-            <a:ext cx="2971800" cy="458788"/>
-          </a:xfrm>
-          <a:prstGeom prst="rect">
-            <a:avLst/>
-          </a:prstGeom>
-        </p:spPr>
-        <p:txBody>
-          <a:bodyPr vert="horz" lIns="91440" tIns="45720" rIns="91440" bIns="45720" rtlCol="0"/>
-          <a:lstStyle>
-            <a:lvl1pPr algn="l">
-              <a:defRPr sz="1200"/>
-            </a:lvl1pPr>
-          </a:lstStyle>
-          <a:p>
-            <a:endParaRPr lang="en-US"/>
-          </a:p>
-        </p:txBody>
-      </p:sp>
-      <p:sp>
-        <p:nvSpPr>
-          <p:cNvPr id="3" name="Date Placeholder 2"/>
-          <p:cNvSpPr>
-            <a:spLocks noGrp="1"/>
-          </p:cNvSpPr>
-          <p:nvPr>
-            <p:ph type="dt" idx="1"/>
-          </p:nvPr>
-        </p:nvSpPr>
-        <p:spPr>
-          <a:xfrm>
-            <a:off x="3884613" y="0"/>
-            <a:ext cx="2971800" cy="458788"/>
-          </a:xfrm>
-          <a:prstGeom prst="rect">
-            <a:avLst/>
-          </a:prstGeom>
-        </p:spPr>
-        <p:txBody>
-          <a:bodyPr vert="horz" lIns="91440" tIns="45720" rIns="91440" bIns="45720" rtlCol="0"/>
-          <a:lstStyle>
-            <a:lvl1pPr algn="r">
-              <a:defRPr sz="1200"/>
-            </a:lvl1pPr>
-          </a:lstStyle>
-          <a:p>
-            <a:fld id="{5282F153-3F37-0F45-9E97-73ACFA13230C}" type="datetimeFigureOut">
-              <a:rPr lang="en-US"/>
-              <a:t>7/23/19</a:t>
-            </a:fld>
-            <a:endParaRPr lang="en-US"/>
-          </a:p>
-        </p:txBody>
-      </p:sp>
-      <p:sp>
-        <p:nvSpPr>
-          <p:cNvPr id="4" name="Slide Image Placeholder 3"/>
-          <p:cNvSpPr>
-            <a:spLocks noGrp="1" noRot="1" noChangeAspect="1"/>
-          </p:cNvSpPr>
-          <p:nvPr>
-            <p:ph type="sldImg" idx="2"/>
-          </p:nvPr>
-        </p:nvSpPr>
-        <p:spPr>
-          <a:xfrm>
-            <a:off x="685800" y="1143000"/>
-            <a:ext cx="5486400" cy="3086100"/>
-          </a:xfrm>
-          <a:prstGeom prst="rect">
-            <a:avLst/>
-          </a:prstGeom>
-          <a:noFill/>
-          <a:ln w="12700">
-            <a:solidFill>
-              <a:prstClr val="black"/>
-            </a:solidFill>
-          </a:ln>
-        </p:spPr>
-        <p:txBody>
-          <a:bodyPr vert="horz" lIns="91440" tIns="45720" rIns="91440" bIns="45720" rtlCol="0" anchor="ctr"/>
-          <a:lstStyle/>
-          <a:p>
-            <a:endParaRPr lang="en-US"/>
-          </a:p>
-        </p:txBody>
-      </p:sp>
-      <p:sp>
-        <p:nvSpPr>
-          <p:cNvPr id="5" name="Notes Placeholder 4"/>
-          <p:cNvSpPr>
-            <a:spLocks noGrp="1"/>
-          </p:cNvSpPr>
-          <p:nvPr>
-            <p:ph type="body" sz="quarter" idx="3"/>
-          </p:nvPr>
-        </p:nvSpPr>
-        <p:spPr>
-          <a:xfrm>
-            <a:off x="685800" y="4400550"/>
-            <a:ext cx="5486400" cy="3600450"/>
-          </a:xfrm>
-          <a:prstGeom prst="rect">
-            <a:avLst/>
-          </a:prstGeom>
-        </p:spPr>
-        <p:txBody>
-          <a:bodyPr vert="horz" lIns="91440" tIns="45720" rIns="91440" bIns="45720" rtlCol="0"/>
-          <a:lstStyle/>
-          <a:p>
-            <a:pPr lvl="0"/>
-            <a:r>
-              <a:rPr lang="en-US"/>
-              <a:t>Click to edit Master text styles</a:t>
-            </a:r>
-          </a:p>
-          <a:p>
-            <a:pPr lvl="1"/>
-            <a:r>
-              <a:rPr lang="en-US"/>
-              <a:t>Second level</a:t>
-            </a:r>
-          </a:p>
-          <a:p>
-            <a:pPr lvl="2"/>
-            <a:r>
-              <a:rPr lang="en-US"/>
-              <a:t>Third level</a:t>
-            </a:r>
-          </a:p>
-          <a:p>
-            <a:pPr lvl="3"/>
-            <a:r>
-              <a:rPr lang="en-US"/>
-              <a:t>Fourth level</a:t>
-            </a:r>
-          </a:p>
-          <a:p>
-            <a:pPr lvl="4"/>
-            <a:r>
-              <a:rPr lang="en-US"/>
-              <a:t>Fifth level</a:t>
-            </a:r>
-          </a:p>
-        </p:txBody>
-      </p:sp>
-      <p:sp>
-        <p:nvSpPr>
-          <p:cNvPr id="6" name="Footer Placeholder 5"/>
-          <p:cNvSpPr>
-            <a:spLocks noGrp="1"/>
-          </p:cNvSpPr>
-          <p:nvPr>
-            <p:ph type="ftr" sz="quarter" idx="4"/>
-          </p:nvPr>
-        </p:nvSpPr>
-        <p:spPr>
-          <a:xfrm>
-            <a:off x="0" y="8685213"/>
-            <a:ext cx="2971800" cy="458787"/>
-          </a:xfrm>
-          <a:prstGeom prst="rect">
-            <a:avLst/>
-          </a:prstGeom>
-        </p:spPr>
-        <p:txBody>
-          <a:bodyPr vert="horz" lIns="91440" tIns="45720" rIns="91440" bIns="45720" rtlCol="0" anchor="b"/>
-          <a:lstStyle>
-            <a:lvl1pPr algn="l">
-              <a:defRPr sz="1200"/>
-            </a:lvl1pPr>
-          </a:lstStyle>
-          <a:p>
-            <a:endParaRPr lang="en-US"/>
-          </a:p>
-        </p:txBody>
-      </p:sp>
-      <p:sp>
-        <p:nvSpPr>
-          <p:cNvPr id="7" name="Slide Number Placeholder 6"/>
-          <p:cNvSpPr>
-            <a:spLocks noGrp="1"/>
-          </p:cNvSpPr>
-          <p:nvPr>
-            <p:ph type="sldNum" sz="quarter" idx="5"/>
-          </p:nvPr>
-        </p:nvSpPr>
-        <p:spPr>
-          <a:xfrm>
-            <a:off x="3884613" y="8685213"/>
-            <a:ext cx="2971800" cy="458787"/>
-          </a:xfrm>
-          <a:prstGeom prst="rect">
-            <a:avLst/>
-          </a:prstGeom>
-        </p:spPr>
-        <p:txBody>
-          <a:bodyPr vert="horz" lIns="91440" tIns="45720" rIns="91440" bIns="45720" rtlCol="0" anchor="b"/>
-          <a:lstStyle>
-            <a:lvl1pPr algn="r">
-              <a:defRPr sz="1200"/>
-            </a:lvl1pPr>
-          </a:lstStyle>
-          <a:p>
-            <a:fld id="{CE5E9CC1-C706-0F49-92D6-E571CC5EEA8F}" type="slidenum">
-              <a:rPr lang="en-US"/>
-              <a:t>‹#›</a:t>
-            </a:fld>
-            <a:endParaRPr lang="en-US"/>
-          </a:p>
-        </p:txBody>
-      </p:sp>
     </p:spTree>
     <p:extLst>
       <p:ext uri="{BB962C8B-B14F-4D97-AF65-F5344CB8AC3E}">
-        <p14:creationId xmlns:p14="http://schemas.microsoft.com/office/powerpoint/2010/main" val="1024086991"/>
+        <p14:creationId xmlns:p14="http://schemas.microsoft.com/office/powerpoint/2010/main" val="2817511614"/>
       </p:ext>
     </p:extLst>
   </p:cSld>
@@ -506,10 +332,6 @@
           <a:bodyPr/>
           <a:lstStyle/>
           <a:p>
-            <a:r>
-              <a:rPr lang="en-US" dirty="0"/>
-              <a:t/>
-            </a:r>
             <a:endParaRPr lang="en-US" dirty="0"/>
           </a:p>
         </p:txBody>
@@ -594,10 +416,6 @@
           <a:bodyPr/>
           <a:lstStyle/>
           <a:p>
-            <a:r>
-              <a:rPr lang="en-US" dirty="0"/>
-              <a:t/>
-            </a:r>
             <a:endParaRPr lang="en-US" dirty="0"/>
           </a:p>
         </p:txBody>
@@ -682,10 +500,6 @@
           <a:bodyPr/>
           <a:lstStyle/>
           <a:p>
-            <a:r>
-              <a:rPr lang="en-US" dirty="0"/>
-              <a:t/>
-            </a:r>
             <a:endParaRPr lang="en-US" dirty="0"/>
           </a:p>
         </p:txBody>
@@ -770,10 +584,6 @@
           <a:bodyPr/>
           <a:lstStyle/>
           <a:p>
-            <a:r>
-              <a:rPr lang="en-US" dirty="0"/>
-              <a:t/>
-            </a:r>
             <a:endParaRPr lang="en-US" dirty="0"/>
           </a:p>
         </p:txBody>
@@ -858,10 +668,6 @@
           <a:bodyPr/>
           <a:lstStyle/>
           <a:p>
-            <a:r>
-              <a:rPr lang="en-US" dirty="0"/>
-              <a:t/>
-            </a:r>
             <a:endParaRPr lang="en-US" dirty="0"/>
           </a:p>
         </p:txBody>
@@ -946,10 +752,6 @@
           <a:bodyPr/>
           <a:lstStyle/>
           <a:p>
-            <a:r>
-              <a:rPr lang="en-US" dirty="0"/>
-              <a:t/>
-            </a:r>
             <a:endParaRPr lang="en-US" dirty="0"/>
           </a:p>
         </p:txBody>
@@ -1034,10 +836,6 @@
           <a:bodyPr/>
           <a:lstStyle/>
           <a:p>
-            <a:r>
-              <a:rPr lang="en-US" dirty="0"/>
-              <a:t/>
-            </a:r>
             <a:endParaRPr lang="en-US" dirty="0"/>
           </a:p>
         </p:txBody>
@@ -1111,6 +909,11 @@
 <file path=ppt/slideMasters/slideMaster1.xml><?xml version="1.0" encoding="utf-8"?>
 <p:sldMaster xmlns:a="http://schemas.openxmlformats.org/drawingml/2006/main" xmlns:r="http://schemas.openxmlformats.org/officeDocument/2006/relationships" xmlns:p="http://schemas.openxmlformats.org/presentationml/2006/main">
   <p:cSld>
+    <p:bg>
+      <p:bgRef idx="1001">
+        <a:schemeClr val="bg1"/>
+      </p:bgRef>
+    </p:bg>
     <p:spTree>
       <p:nvGrpSpPr>
         <p:cNvPr id="1" name=""/>
@@ -1393,6 +1196,7 @@
         <a:solidFill>
           <a:srgbClr val="0D1117"/>
         </a:solidFill>
+        <a:effectLst/>
       </p:bgPr>
     </p:bg>
     <p:spTree>
@@ -1430,7 +1234,7 @@
           <a:bodyPr wrap="square" rtlCol="0" anchor="ctr"/>
           <a:lstStyle/>
           <a:p>
-            <a:pPr algn="ctr" indent="0" marL="0">
+            <a:pPr marL="0" indent="0" algn="ctr">
               <a:buNone/>
             </a:pPr>
             <a:r>
@@ -1466,7 +1270,7 @@
           <a:bodyPr wrap="square" rtlCol="0" anchor="ctr"/>
           <a:lstStyle/>
           <a:p>
-            <a:pPr algn="ctr" indent="0" marL="0">
+            <a:pPr marL="0" indent="0" algn="ctr">
               <a:buNone/>
             </a:pPr>
             <a:r>
@@ -1502,7 +1306,7 @@
           <a:bodyPr wrap="square" rtlCol="0" anchor="ctr"/>
           <a:lstStyle/>
           <a:p>
-            <a:pPr algn="ctr" indent="0" marL="0">
+            <a:pPr marL="0" indent="0" algn="ctr">
               <a:buNone/>
             </a:pPr>
             <a:r>
@@ -1536,6 +1340,13 @@
           </a:solidFill>
           <a:ln/>
         </p:spPr>
+        <p:txBody>
+          <a:bodyPr/>
+          <a:lstStyle/>
+          <a:p>
+            <a:endParaRPr lang="en-US"/>
+          </a:p>
+        </p:txBody>
       </p:sp>
     </p:spTree>
   </p:cSld>
@@ -1553,6 +1364,7 @@
         <a:solidFill>
           <a:srgbClr val="0D1117"/>
         </a:solidFill>
+        <a:effectLst/>
       </p:bgPr>
     </p:bg>
     <p:spTree>
@@ -1590,7 +1402,7 @@
           <a:bodyPr wrap="square" rtlCol="0" anchor="ctr"/>
           <a:lstStyle/>
           <a:p>
-            <a:pPr indent="0" marL="0">
+            <a:pPr marL="0" indent="0">
               <a:buNone/>
             </a:pPr>
             <a:r>
@@ -1629,7 +1441,7 @@
           <a:bodyPr wrap="square" rtlCol="0" anchor="ctr"/>
           <a:lstStyle/>
           <a:p>
-            <a:pPr indent="0" marL="0">
+            <a:pPr marL="0" indent="0">
               <a:buNone/>
             </a:pPr>
             <a:r>
@@ -1655,7 +1467,7 @@
         </p:nvSpPr>
         <p:spPr>
           <a:xfrm>
-            <a:off x="365760" y="1005840"/>
+            <a:off x="365760" y="1188720"/>
             <a:ext cx="5303520" cy="3017520"/>
           </a:xfrm>
           <a:prstGeom prst="rect">
@@ -1671,6 +1483,13 @@
             <a:prstDash val="solid"/>
           </a:ln>
         </p:spPr>
+        <p:txBody>
+          <a:bodyPr/>
+          <a:lstStyle/>
+          <a:p>
+            <a:endParaRPr lang="en-US"/>
+          </a:p>
+        </p:txBody>
       </p:sp>
       <p:sp>
         <p:nvSpPr>
@@ -1680,7 +1499,7 @@
         </p:nvSpPr>
         <p:spPr>
           <a:xfrm>
-            <a:off x="365760" y="1005840"/>
+            <a:off x="365760" y="1188720"/>
             <a:ext cx="36576" cy="3017520"/>
           </a:xfrm>
           <a:prstGeom prst="rect">
@@ -1691,6 +1510,13 @@
           </a:solidFill>
           <a:ln/>
         </p:spPr>
+        <p:txBody>
+          <a:bodyPr/>
+          <a:lstStyle/>
+          <a:p>
+            <a:endParaRPr lang="en-US"/>
+          </a:p>
+        </p:txBody>
       </p:sp>
       <p:sp>
         <p:nvSpPr>
@@ -1700,7 +1526,7 @@
         </p:nvSpPr>
         <p:spPr>
           <a:xfrm>
-            <a:off x="502920" y="1097280"/>
+            <a:off x="402336" y="1251373"/>
             <a:ext cx="5074920" cy="2834640"/>
           </a:xfrm>
           <a:prstGeom prst="rect">
@@ -1713,7 +1539,7 @@
           <a:bodyPr wrap="square" rtlCol="0" anchor="t"/>
           <a:lstStyle/>
           <a:p>
-            <a:pPr indent="0" marL="0">
+            <a:pPr marL="0" indent="0">
               <a:buNone/>
             </a:pPr>
             <a:r>
@@ -1730,7 +1556,7 @@
             <a:endParaRPr lang="en-US" sz="900" dirty="0"/>
           </a:p>
           <a:p>
-            <a:pPr indent="0" marL="0">
+            <a:pPr marL="0" indent="0">
               <a:buNone/>
             </a:pPr>
             <a:r>
@@ -1747,7 +1573,7 @@
             <a:endParaRPr lang="en-US" sz="900" dirty="0"/>
           </a:p>
           <a:p>
-            <a:pPr indent="0" marL="0">
+            <a:pPr marL="0" indent="0">
               <a:buNone/>
             </a:pPr>
             <a:r>
@@ -1764,7 +1590,7 @@
             <a:endParaRPr lang="en-US" sz="900" dirty="0"/>
           </a:p>
           <a:p>
-            <a:pPr indent="0" marL="0">
+            <a:pPr marL="0" indent="0">
               <a:buNone/>
             </a:pPr>
             <a:r>
@@ -1781,13 +1607,13 @@
             <a:endParaRPr lang="en-US" sz="900" dirty="0"/>
           </a:p>
           <a:p>
-            <a:pPr indent="0" marL="0">
-              <a:buNone/>
-            </a:pPr>
-            <a:endParaRPr lang="en-US" sz="900" dirty="0"/>
-          </a:p>
-          <a:p>
-            <a:pPr indent="0" marL="0">
+            <a:pPr marL="0" indent="0">
+              <a:buNone/>
+            </a:pPr>
+            <a:endParaRPr lang="en-US" sz="900" dirty="0"/>
+          </a:p>
+          <a:p>
+            <a:pPr marL="0" indent="0">
               <a:buNone/>
             </a:pPr>
             <a:r>
@@ -1804,7 +1630,7 @@
             <a:endParaRPr lang="en-US" sz="900" dirty="0"/>
           </a:p>
           <a:p>
-            <a:pPr indent="0" marL="0">
+            <a:pPr marL="0" indent="0">
               <a:buNone/>
             </a:pPr>
             <a:r>
@@ -1821,7 +1647,7 @@
             <a:endParaRPr lang="en-US" sz="900" dirty="0"/>
           </a:p>
           <a:p>
-            <a:pPr indent="0" marL="0">
+            <a:pPr marL="0" indent="0">
               <a:buNone/>
             </a:pPr>
             <a:r>
@@ -1838,7 +1664,7 @@
             <a:endParaRPr lang="en-US" sz="900" dirty="0"/>
           </a:p>
           <a:p>
-            <a:pPr indent="0" marL="0">
+            <a:pPr marL="0" indent="0">
               <a:buNone/>
             </a:pPr>
             <a:r>
@@ -1855,7 +1681,7 @@
             <a:endParaRPr lang="en-US" sz="900" dirty="0"/>
           </a:p>
           <a:p>
-            <a:pPr indent="0" marL="0">
+            <a:pPr marL="0" indent="0">
               <a:buNone/>
             </a:pPr>
             <a:r>
@@ -1872,7 +1698,7 @@
             <a:endParaRPr lang="en-US" sz="900" dirty="0"/>
           </a:p>
           <a:p>
-            <a:pPr indent="0" marL="0">
+            <a:pPr marL="0" indent="0">
               <a:buNone/>
             </a:pPr>
             <a:r>
@@ -1889,7 +1715,7 @@
             <a:endParaRPr lang="en-US" sz="900" dirty="0"/>
           </a:p>
           <a:p>
-            <a:pPr indent="0" marL="0">
+            <a:pPr marL="0" indent="0">
               <a:buNone/>
             </a:pPr>
             <a:r>
@@ -1906,7 +1732,7 @@
             <a:endParaRPr lang="en-US" sz="900" dirty="0"/>
           </a:p>
           <a:p>
-            <a:pPr indent="0" marL="0">
+            <a:pPr marL="0" indent="0">
               <a:buNone/>
             </a:pPr>
             <a:r>
@@ -1923,7 +1749,7 @@
             <a:endParaRPr lang="en-US" sz="900" dirty="0"/>
           </a:p>
           <a:p>
-            <a:pPr indent="0" marL="0">
+            <a:pPr marL="0" indent="0">
               <a:buNone/>
             </a:pPr>
             <a:r>
@@ -1965,6 +1791,13 @@
             <a:prstDash val="solid"/>
           </a:ln>
         </p:spPr>
+        <p:txBody>
+          <a:bodyPr/>
+          <a:lstStyle/>
+          <a:p>
+            <a:endParaRPr lang="en-US"/>
+          </a:p>
+        </p:txBody>
       </p:sp>
       <p:sp>
         <p:nvSpPr>
@@ -1987,7 +1820,7 @@
           <a:bodyPr wrap="square" rtlCol="0" anchor="ctr"/>
           <a:lstStyle/>
           <a:p>
-            <a:pPr indent="0" marL="0">
+            <a:pPr marL="0" indent="0">
               <a:buNone/>
             </a:pPr>
             <a:r>
@@ -2023,7 +1856,7 @@
           <a:bodyPr wrap="square" rtlCol="0" anchor="t"/>
           <a:lstStyle/>
           <a:p>
-            <a:pPr indent="0" marL="0">
+            <a:pPr marL="0" indent="0">
               <a:buNone/>
             </a:pPr>
             <a:r>
@@ -2037,13 +1870,13 @@
             <a:endParaRPr lang="en-US" sz="1000" dirty="0"/>
           </a:p>
           <a:p>
-            <a:pPr indent="0" marL="0">
+            <a:pPr marL="0" indent="0">
               <a:buNone/>
             </a:pPr>
             <a:endParaRPr lang="en-US" sz="1000" dirty="0"/>
           </a:p>
           <a:p>
-            <a:pPr indent="0" marL="0">
+            <a:pPr marL="0" indent="0">
               <a:buNone/>
             </a:pPr>
             <a:r>
@@ -2074,6 +1907,7 @@
         <a:solidFill>
           <a:srgbClr val="0D1117"/>
         </a:solidFill>
+        <a:effectLst/>
       </p:bgPr>
     </p:bg>
     <p:spTree>
@@ -2111,7 +1945,7 @@
           <a:bodyPr wrap="square" rtlCol="0" anchor="ctr"/>
           <a:lstStyle/>
           <a:p>
-            <a:pPr indent="0" marL="0">
+            <a:pPr marL="0" indent="0">
               <a:buNone/>
             </a:pPr>
             <a:r>
@@ -2150,7 +1984,7 @@
           <a:bodyPr wrap="square" rtlCol="0" anchor="ctr"/>
           <a:lstStyle/>
           <a:p>
-            <a:pPr indent="0" marL="0">
+            <a:pPr marL="0" indent="0">
               <a:buNone/>
             </a:pPr>
             <a:r>
@@ -2189,6 +2023,13 @@
             <a:prstDash val="solid"/>
           </a:ln>
         </p:spPr>
+        <p:txBody>
+          <a:bodyPr/>
+          <a:lstStyle/>
+          <a:p>
+            <a:endParaRPr lang="en-US"/>
+          </a:p>
+        </p:txBody>
       </p:sp>
       <p:sp>
         <p:nvSpPr>
@@ -2209,6 +2050,13 @@
           </a:solidFill>
           <a:ln/>
         </p:spPr>
+        <p:txBody>
+          <a:bodyPr/>
+          <a:lstStyle/>
+          <a:p>
+            <a:endParaRPr lang="en-US"/>
+          </a:p>
+        </p:txBody>
       </p:sp>
       <p:sp>
         <p:nvSpPr>
@@ -2231,7 +2079,7 @@
           <a:bodyPr wrap="square" rtlCol="0" anchor="t"/>
           <a:lstStyle/>
           <a:p>
-            <a:pPr indent="0" marL="0">
+            <a:pPr marL="0" indent="0">
               <a:buNone/>
             </a:pPr>
             <a:r>
@@ -2248,7 +2096,7 @@
             <a:endParaRPr lang="en-US" sz="900" dirty="0"/>
           </a:p>
           <a:p>
-            <a:pPr indent="0" marL="0">
+            <a:pPr marL="0" indent="0">
               <a:buNone/>
             </a:pPr>
             <a:r>
@@ -2265,7 +2113,7 @@
             <a:endParaRPr lang="en-US" sz="900" dirty="0"/>
           </a:p>
           <a:p>
-            <a:pPr indent="0" marL="0">
+            <a:pPr marL="0" indent="0">
               <a:buNone/>
             </a:pPr>
             <a:r>
@@ -2282,7 +2130,7 @@
             <a:endParaRPr lang="en-US" sz="900" dirty="0"/>
           </a:p>
           <a:p>
-            <a:pPr indent="0" marL="0">
+            <a:pPr marL="0" indent="0">
               <a:buNone/>
             </a:pPr>
             <a:r>
@@ -2299,7 +2147,7 @@
             <a:endParaRPr lang="en-US" sz="900" dirty="0"/>
           </a:p>
           <a:p>
-            <a:pPr indent="0" marL="0">
+            <a:pPr marL="0" indent="0">
               <a:buNone/>
             </a:pPr>
             <a:r>
@@ -2316,7 +2164,7 @@
             <a:endParaRPr lang="en-US" sz="900" dirty="0"/>
           </a:p>
           <a:p>
-            <a:pPr indent="0" marL="0">
+            <a:pPr marL="0" indent="0">
               <a:buNone/>
             </a:pPr>
             <a:r>
@@ -2353,6 +2201,13 @@
           </a:solidFill>
           <a:ln/>
         </p:spPr>
+        <p:txBody>
+          <a:bodyPr/>
+          <a:lstStyle/>
+          <a:p>
+            <a:endParaRPr lang="en-US"/>
+          </a:p>
+        </p:txBody>
       </p:sp>
       <p:sp>
         <p:nvSpPr>
@@ -2375,7 +2230,7 @@
           <a:bodyPr wrap="square" rtlCol="0" anchor="ctr"/>
           <a:lstStyle/>
           <a:p>
-            <a:pPr indent="0" marL="0">
+            <a:pPr marL="0" indent="0">
               <a:buNone/>
             </a:pPr>
             <a:r>
@@ -2409,6 +2264,13 @@
           </a:solidFill>
           <a:ln/>
         </p:spPr>
+        <p:txBody>
+          <a:bodyPr/>
+          <a:lstStyle/>
+          <a:p>
+            <a:endParaRPr lang="en-US"/>
+          </a:p>
+        </p:txBody>
       </p:sp>
       <p:sp>
         <p:nvSpPr>
@@ -2429,6 +2291,13 @@
           </a:solidFill>
           <a:ln/>
         </p:spPr>
+        <p:txBody>
+          <a:bodyPr/>
+          <a:lstStyle/>
+          <a:p>
+            <a:endParaRPr lang="en-US"/>
+          </a:p>
+        </p:txBody>
       </p:sp>
       <p:sp>
         <p:nvSpPr>
@@ -2451,7 +2320,7 @@
           <a:bodyPr wrap="square" rtlCol="0" anchor="ctr"/>
           <a:lstStyle/>
           <a:p>
-            <a:pPr indent="0" marL="0">
+            <a:pPr marL="0" indent="0">
               <a:buNone/>
             </a:pPr>
             <a:r>
@@ -2487,7 +2356,7 @@
           <a:bodyPr wrap="square" rtlCol="0" anchor="ctr"/>
           <a:lstStyle/>
           <a:p>
-            <a:pPr indent="0" marL="0">
+            <a:pPr marL="0" indent="0">
               <a:buNone/>
             </a:pPr>
             <a:r>
@@ -2501,7 +2370,7 @@
             <a:endParaRPr lang="en-US" sz="1000" dirty="0"/>
           </a:p>
           <a:p>
-            <a:pPr indent="0" marL="0">
+            <a:pPr marL="0" indent="0">
               <a:buNone/>
             </a:pPr>
             <a:r>
@@ -2515,13 +2384,13 @@
             <a:endParaRPr lang="en-US" sz="1000" dirty="0"/>
           </a:p>
           <a:p>
-            <a:pPr indent="0" marL="0">
+            <a:pPr marL="0" indent="0">
               <a:buNone/>
             </a:pPr>
             <a:endParaRPr lang="en-US" sz="1000" dirty="0"/>
           </a:p>
           <a:p>
-            <a:pPr indent="0" marL="0">
+            <a:pPr marL="0" indent="0">
               <a:buNone/>
             </a:pPr>
             <a:r>
@@ -2535,7 +2404,7 @@
             <a:endParaRPr lang="en-US" sz="1000" dirty="0"/>
           </a:p>
           <a:p>
-            <a:pPr indent="0" marL="0">
+            <a:pPr marL="0" indent="0">
               <a:buNone/>
             </a:pPr>
             <a:r>
@@ -2569,6 +2438,13 @@
           </a:solidFill>
           <a:ln/>
         </p:spPr>
+        <p:txBody>
+          <a:bodyPr/>
+          <a:lstStyle/>
+          <a:p>
+            <a:endParaRPr lang="en-US"/>
+          </a:p>
+        </p:txBody>
       </p:sp>
       <p:sp>
         <p:nvSpPr>
@@ -2589,6 +2465,13 @@
           </a:solidFill>
           <a:ln/>
         </p:spPr>
+        <p:txBody>
+          <a:bodyPr/>
+          <a:lstStyle/>
+          <a:p>
+            <a:endParaRPr lang="en-US"/>
+          </a:p>
+        </p:txBody>
       </p:sp>
       <p:sp>
         <p:nvSpPr>
@@ -2611,7 +2494,7 @@
           <a:bodyPr wrap="square" rtlCol="0" anchor="ctr"/>
           <a:lstStyle/>
           <a:p>
-            <a:pPr indent="0" marL="0">
+            <a:pPr marL="0" indent="0">
               <a:buNone/>
             </a:pPr>
             <a:r>
@@ -2642,6 +2525,7 @@
         <a:solidFill>
           <a:srgbClr val="0D1117"/>
         </a:solidFill>
+        <a:effectLst/>
       </p:bgPr>
     </p:bg>
     <p:spTree>
@@ -2679,7 +2563,7 @@
           <a:bodyPr wrap="square" rtlCol="0" anchor="ctr"/>
           <a:lstStyle/>
           <a:p>
-            <a:pPr indent="0" marL="0">
+            <a:pPr marL="0" indent="0">
               <a:buNone/>
             </a:pPr>
             <a:r>
@@ -2718,7 +2602,7 @@
           <a:bodyPr wrap="square" rtlCol="0" anchor="ctr"/>
           <a:lstStyle/>
           <a:p>
-            <a:pPr indent="0" marL="0">
+            <a:pPr marL="0" indent="0">
               <a:buNone/>
             </a:pPr>
             <a:r>
@@ -2757,6 +2641,13 @@
             <a:prstDash val="solid"/>
           </a:ln>
         </p:spPr>
+        <p:txBody>
+          <a:bodyPr/>
+          <a:lstStyle/>
+          <a:p>
+            <a:endParaRPr lang="en-US"/>
+          </a:p>
+        </p:txBody>
       </p:sp>
       <p:sp>
         <p:nvSpPr>
@@ -2777,6 +2668,13 @@
           </a:solidFill>
           <a:ln/>
         </p:spPr>
+        <p:txBody>
+          <a:bodyPr/>
+          <a:lstStyle/>
+          <a:p>
+            <a:endParaRPr lang="en-US"/>
+          </a:p>
+        </p:txBody>
       </p:sp>
       <p:sp>
         <p:nvSpPr>
@@ -2799,7 +2697,7 @@
           <a:bodyPr wrap="square" rtlCol="0" anchor="t"/>
           <a:lstStyle/>
           <a:p>
-            <a:pPr indent="0" marL="0">
+            <a:pPr marL="0" indent="0">
               <a:buNone/>
             </a:pPr>
             <a:r>
@@ -2816,7 +2714,7 @@
             <a:endParaRPr lang="en-US" sz="900" dirty="0"/>
           </a:p>
           <a:p>
-            <a:pPr indent="0" marL="0">
+            <a:pPr marL="0" indent="0">
               <a:buNone/>
             </a:pPr>
             <a:r>
@@ -2833,7 +2731,7 @@
             <a:endParaRPr lang="en-US" sz="900" dirty="0"/>
           </a:p>
           <a:p>
-            <a:pPr indent="0" marL="0">
+            <a:pPr marL="0" indent="0">
               <a:buNone/>
             </a:pPr>
             <a:r>
@@ -2850,7 +2748,7 @@
             <a:endParaRPr lang="en-US" sz="900" dirty="0"/>
           </a:p>
           <a:p>
-            <a:pPr indent="0" marL="0">
+            <a:pPr marL="0" indent="0">
               <a:buNone/>
             </a:pPr>
             <a:r>
@@ -2867,7 +2765,7 @@
             <a:endParaRPr lang="en-US" sz="900" dirty="0"/>
           </a:p>
           <a:p>
-            <a:pPr indent="0" marL="0">
+            <a:pPr marL="0" indent="0">
               <a:buNone/>
             </a:pPr>
             <a:r>
@@ -2884,7 +2782,7 @@
             <a:endParaRPr lang="en-US" sz="900" dirty="0"/>
           </a:p>
           <a:p>
-            <a:pPr indent="0" marL="0">
+            <a:pPr marL="0" indent="0">
               <a:buNone/>
             </a:pPr>
             <a:r>
@@ -2901,7 +2799,7 @@
             <a:endParaRPr lang="en-US" sz="900" dirty="0"/>
           </a:p>
           <a:p>
-            <a:pPr indent="0" marL="0">
+            <a:pPr marL="0" indent="0">
               <a:buNone/>
             </a:pPr>
             <a:r>
@@ -2918,7 +2816,7 @@
             <a:endParaRPr lang="en-US" sz="900" dirty="0"/>
           </a:p>
           <a:p>
-            <a:pPr indent="0" marL="0">
+            <a:pPr marL="0" indent="0">
               <a:buNone/>
             </a:pPr>
             <a:r>
@@ -2957,7 +2855,7 @@
           <a:bodyPr wrap="square" rtlCol="0" anchor="ctr"/>
           <a:lstStyle/>
           <a:p>
-            <a:pPr indent="0" marL="0">
+            <a:pPr marL="0" indent="0">
               <a:buNone/>
             </a:pPr>
             <a:r>
@@ -2996,6 +2894,13 @@
             <a:prstDash val="solid"/>
           </a:ln>
         </p:spPr>
+        <p:txBody>
+          <a:bodyPr/>
+          <a:lstStyle/>
+          <a:p>
+            <a:endParaRPr lang="en-US"/>
+          </a:p>
+        </p:txBody>
       </p:sp>
       <p:sp>
         <p:nvSpPr>
@@ -3016,6 +2921,13 @@
           </a:solidFill>
           <a:ln/>
         </p:spPr>
+        <p:txBody>
+          <a:bodyPr/>
+          <a:lstStyle/>
+          <a:p>
+            <a:endParaRPr lang="en-US"/>
+          </a:p>
+        </p:txBody>
       </p:sp>
       <p:sp>
         <p:nvSpPr>
@@ -3038,7 +2950,7 @@
           <a:bodyPr wrap="square" rtlCol="0" anchor="t"/>
           <a:lstStyle/>
           <a:p>
-            <a:pPr indent="0" marL="0">
+            <a:pPr marL="0" indent="0">
               <a:buNone/>
             </a:pPr>
             <a:r>
@@ -3077,7 +2989,7 @@
           <a:bodyPr wrap="square" rtlCol="0" anchor="ctr"/>
           <a:lstStyle/>
           <a:p>
-            <a:pPr indent="0" marL="0">
+            <a:pPr marL="0" indent="0">
               <a:buNone/>
             </a:pPr>
             <a:r>
@@ -3116,6 +3028,13 @@
             <a:prstDash val="solid"/>
           </a:ln>
         </p:spPr>
+        <p:txBody>
+          <a:bodyPr/>
+          <a:lstStyle/>
+          <a:p>
+            <a:endParaRPr lang="en-US"/>
+          </a:p>
+        </p:txBody>
       </p:sp>
       <p:sp>
         <p:nvSpPr>
@@ -3136,6 +3055,13 @@
           </a:solidFill>
           <a:ln/>
         </p:spPr>
+        <p:txBody>
+          <a:bodyPr/>
+          <a:lstStyle/>
+          <a:p>
+            <a:endParaRPr lang="en-US"/>
+          </a:p>
+        </p:txBody>
       </p:sp>
       <p:sp>
         <p:nvSpPr>
@@ -3158,7 +3084,7 @@
           <a:bodyPr wrap="square" rtlCol="0" anchor="t"/>
           <a:lstStyle/>
           <a:p>
-            <a:pPr indent="0" marL="0">
+            <a:pPr marL="0" indent="0">
               <a:buNone/>
             </a:pPr>
             <a:r>
@@ -3195,6 +3121,13 @@
           </a:solidFill>
           <a:ln/>
         </p:spPr>
+        <p:txBody>
+          <a:bodyPr/>
+          <a:lstStyle/>
+          <a:p>
+            <a:endParaRPr lang="en-US"/>
+          </a:p>
+        </p:txBody>
       </p:sp>
       <p:sp>
         <p:nvSpPr>
@@ -3215,6 +3148,13 @@
           </a:solidFill>
           <a:ln/>
         </p:spPr>
+        <p:txBody>
+          <a:bodyPr/>
+          <a:lstStyle/>
+          <a:p>
+            <a:endParaRPr lang="en-US"/>
+          </a:p>
+        </p:txBody>
       </p:sp>
       <p:sp>
         <p:nvSpPr>
@@ -3237,7 +3177,7 @@
           <a:bodyPr wrap="square" rtlCol="0" anchor="ctr"/>
           <a:lstStyle/>
           <a:p>
-            <a:pPr indent="0" marL="0">
+            <a:pPr marL="0" indent="0">
               <a:buNone/>
             </a:pPr>
             <a:r>
@@ -3273,7 +3213,7 @@
           <a:bodyPr wrap="square" rtlCol="0" anchor="ctr"/>
           <a:lstStyle/>
           <a:p>
-            <a:pPr indent="0" marL="0">
+            <a:pPr marL="0" indent="0">
               <a:buNone/>
             </a:pPr>
             <a:r>
@@ -3290,7 +3230,7 @@
             <a:endParaRPr lang="en-US" sz="900" dirty="0"/>
           </a:p>
           <a:p>
-            <a:pPr indent="0" marL="0">
+            <a:pPr marL="0" indent="0">
               <a:buNone/>
             </a:pPr>
             <a:r>
@@ -3324,6 +3264,7 @@
         <a:solidFill>
           <a:srgbClr val="0D1117"/>
         </a:solidFill>
+        <a:effectLst/>
       </p:bgPr>
     </p:bg>
     <p:spTree>
@@ -3361,7 +3302,7 @@
           <a:bodyPr wrap="square" rtlCol="0" anchor="ctr"/>
           <a:lstStyle/>
           <a:p>
-            <a:pPr indent="0" marL="0">
+            <a:pPr marL="0" indent="0">
               <a:buNone/>
             </a:pPr>
             <a:r>
@@ -3400,7 +3341,7 @@
           <a:bodyPr wrap="square" rtlCol="0" anchor="ctr"/>
           <a:lstStyle/>
           <a:p>
-            <a:pPr indent="0" marL="0">
+            <a:pPr marL="0" indent="0">
               <a:buNone/>
             </a:pPr>
             <a:r>
@@ -3439,6 +3380,13 @@
             <a:prstDash val="solid"/>
           </a:ln>
         </p:spPr>
+        <p:txBody>
+          <a:bodyPr/>
+          <a:lstStyle/>
+          <a:p>
+            <a:endParaRPr lang="en-US"/>
+          </a:p>
+        </p:txBody>
       </p:sp>
       <p:sp>
         <p:nvSpPr>
@@ -3459,6 +3407,13 @@
           </a:solidFill>
           <a:ln/>
         </p:spPr>
+        <p:txBody>
+          <a:bodyPr/>
+          <a:lstStyle/>
+          <a:p>
+            <a:endParaRPr lang="en-US"/>
+          </a:p>
+        </p:txBody>
       </p:sp>
       <p:sp>
         <p:nvSpPr>
@@ -3481,7 +3436,7 @@
           <a:bodyPr wrap="square" rtlCol="0" anchor="t"/>
           <a:lstStyle/>
           <a:p>
-            <a:pPr indent="0" marL="0">
+            <a:pPr marL="0" indent="0">
               <a:buNone/>
             </a:pPr>
             <a:r>
@@ -3498,13 +3453,13 @@
             <a:endParaRPr lang="en-US" sz="900" dirty="0"/>
           </a:p>
           <a:p>
-            <a:pPr indent="0" marL="0">
-              <a:buNone/>
-            </a:pPr>
-            <a:endParaRPr lang="en-US" sz="900" dirty="0"/>
-          </a:p>
-          <a:p>
-            <a:pPr indent="0" marL="0">
+            <a:pPr marL="0" indent="0">
+              <a:buNone/>
+            </a:pPr>
+            <a:endParaRPr lang="en-US" sz="900" dirty="0"/>
+          </a:p>
+          <a:p>
+            <a:pPr marL="0" indent="0">
               <a:buNone/>
             </a:pPr>
             <a:r>
@@ -3521,7 +3476,7 @@
             <a:endParaRPr lang="en-US" sz="900" dirty="0"/>
           </a:p>
           <a:p>
-            <a:pPr indent="0" marL="0">
+            <a:pPr marL="0" indent="0">
               <a:buNone/>
             </a:pPr>
             <a:r>
@@ -3538,7 +3493,7 @@
             <a:endParaRPr lang="en-US" sz="900" dirty="0"/>
           </a:p>
           <a:p>
-            <a:pPr indent="0" marL="0">
+            <a:pPr marL="0" indent="0">
               <a:buNone/>
             </a:pPr>
             <a:r>
@@ -3555,7 +3510,7 @@
             <a:endParaRPr lang="en-US" sz="900" dirty="0"/>
           </a:p>
           <a:p>
-            <a:pPr indent="0" marL="0">
+            <a:pPr marL="0" indent="0">
               <a:buNone/>
             </a:pPr>
             <a:r>
@@ -3572,13 +3527,13 @@
             <a:endParaRPr lang="en-US" sz="900" dirty="0"/>
           </a:p>
           <a:p>
-            <a:pPr indent="0" marL="0">
-              <a:buNone/>
-            </a:pPr>
-            <a:endParaRPr lang="en-US" sz="900" dirty="0"/>
-          </a:p>
-          <a:p>
-            <a:pPr indent="0" marL="0">
+            <a:pPr marL="0" indent="0">
+              <a:buNone/>
+            </a:pPr>
+            <a:endParaRPr lang="en-US" sz="900" dirty="0"/>
+          </a:p>
+          <a:p>
+            <a:pPr marL="0" indent="0">
               <a:buNone/>
             </a:pPr>
             <a:r>
@@ -3595,7 +3550,7 @@
             <a:endParaRPr lang="en-US" sz="900" dirty="0"/>
           </a:p>
           <a:p>
-            <a:pPr indent="0" marL="0">
+            <a:pPr marL="0" indent="0">
               <a:buNone/>
             </a:pPr>
             <a:r>
@@ -3612,7 +3567,7 @@
             <a:endParaRPr lang="en-US" sz="900" dirty="0"/>
           </a:p>
           <a:p>
-            <a:pPr indent="0" marL="0">
+            <a:pPr marL="0" indent="0">
               <a:buNone/>
             </a:pPr>
             <a:r>
@@ -3629,7 +3584,7 @@
             <a:endParaRPr lang="en-US" sz="900" dirty="0"/>
           </a:p>
           <a:p>
-            <a:pPr indent="0" marL="0">
+            <a:pPr marL="0" indent="0">
               <a:buNone/>
             </a:pPr>
             <a:r>
@@ -3646,7 +3601,7 @@
             <a:endParaRPr lang="en-US" sz="900" dirty="0"/>
           </a:p>
           <a:p>
-            <a:pPr indent="0" marL="0">
+            <a:pPr marL="0" indent="0">
               <a:buNone/>
             </a:pPr>
             <a:r>
@@ -3688,6 +3643,13 @@
             <a:prstDash val="solid"/>
           </a:ln>
         </p:spPr>
+        <p:txBody>
+          <a:bodyPr/>
+          <a:lstStyle/>
+          <a:p>
+            <a:endParaRPr lang="en-US"/>
+          </a:p>
+        </p:txBody>
       </p:sp>
       <p:sp>
         <p:nvSpPr>
@@ -3708,6 +3670,13 @@
           </a:solidFill>
           <a:ln/>
         </p:spPr>
+        <p:txBody>
+          <a:bodyPr/>
+          <a:lstStyle/>
+          <a:p>
+            <a:endParaRPr lang="en-US"/>
+          </a:p>
+        </p:txBody>
       </p:sp>
       <p:sp>
         <p:nvSpPr>
@@ -3730,7 +3699,7 @@
           <a:bodyPr wrap="square" rtlCol="0" anchor="t"/>
           <a:lstStyle/>
           <a:p>
-            <a:pPr indent="0" marL="0">
+            <a:pPr marL="0" indent="0">
               <a:buNone/>
             </a:pPr>
             <a:r>
@@ -3747,7 +3716,7 @@
             <a:endParaRPr lang="en-US" sz="900" dirty="0"/>
           </a:p>
           <a:p>
-            <a:pPr indent="0" marL="0">
+            <a:pPr marL="0" indent="0">
               <a:buNone/>
             </a:pPr>
             <a:r>
@@ -3764,7 +3733,7 @@
             <a:endParaRPr lang="en-US" sz="900" dirty="0"/>
           </a:p>
           <a:p>
-            <a:pPr indent="0" marL="0">
+            <a:pPr marL="0" indent="0">
               <a:buNone/>
             </a:pPr>
             <a:r>
@@ -3781,7 +3750,7 @@
             <a:endParaRPr lang="en-US" sz="900" dirty="0"/>
           </a:p>
           <a:p>
-            <a:pPr indent="0" marL="0">
+            <a:pPr marL="0" indent="0">
               <a:buNone/>
             </a:pPr>
             <a:r>
@@ -3798,7 +3767,7 @@
             <a:endParaRPr lang="en-US" sz="900" dirty="0"/>
           </a:p>
           <a:p>
-            <a:pPr indent="0" marL="0">
+            <a:pPr marL="0" indent="0">
               <a:buNone/>
             </a:pPr>
             <a:r>
@@ -3815,7 +3784,7 @@
             <a:endParaRPr lang="en-US" sz="900" dirty="0"/>
           </a:p>
           <a:p>
-            <a:pPr indent="0" marL="0">
+            <a:pPr marL="0" indent="0">
               <a:buNone/>
             </a:pPr>
             <a:r>
@@ -3832,7 +3801,7 @@
             <a:endParaRPr lang="en-US" sz="900" dirty="0"/>
           </a:p>
           <a:p>
-            <a:pPr indent="0" marL="0">
+            <a:pPr marL="0" indent="0">
               <a:buNone/>
             </a:pPr>
             <a:r>
@@ -3849,7 +3818,7 @@
             <a:endParaRPr lang="en-US" sz="900" dirty="0"/>
           </a:p>
           <a:p>
-            <a:pPr indent="0" marL="0">
+            <a:pPr marL="0" indent="0">
               <a:buNone/>
             </a:pPr>
             <a:r>
@@ -3866,13 +3835,13 @@
             <a:endParaRPr lang="en-US" sz="900" dirty="0"/>
           </a:p>
           <a:p>
-            <a:pPr indent="0" marL="0">
-              <a:buNone/>
-            </a:pPr>
-            <a:endParaRPr lang="en-US" sz="900" dirty="0"/>
-          </a:p>
-          <a:p>
-            <a:pPr indent="0" marL="0">
+            <a:pPr marL="0" indent="0">
+              <a:buNone/>
+            </a:pPr>
+            <a:endParaRPr lang="en-US" sz="900" dirty="0"/>
+          </a:p>
+          <a:p>
+            <a:pPr marL="0" indent="0">
               <a:buNone/>
             </a:pPr>
             <a:r>
@@ -3889,7 +3858,7 @@
             <a:endParaRPr lang="en-US" sz="900" dirty="0"/>
           </a:p>
           <a:p>
-            <a:pPr indent="0" marL="0">
+            <a:pPr marL="0" indent="0">
               <a:buNone/>
             </a:pPr>
             <a:r>
@@ -3906,7 +3875,7 @@
             <a:endParaRPr lang="en-US" sz="900" dirty="0"/>
           </a:p>
           <a:p>
-            <a:pPr indent="0" marL="0">
+            <a:pPr marL="0" indent="0">
               <a:buNone/>
             </a:pPr>
             <a:r>
@@ -3943,6 +3912,13 @@
           </a:solidFill>
           <a:ln/>
         </p:spPr>
+        <p:txBody>
+          <a:bodyPr/>
+          <a:lstStyle/>
+          <a:p>
+            <a:endParaRPr lang="en-US"/>
+          </a:p>
+        </p:txBody>
       </p:sp>
       <p:sp>
         <p:nvSpPr>
@@ -3965,7 +3941,7 @@
           <a:bodyPr wrap="square" rtlCol="0" anchor="ctr"/>
           <a:lstStyle/>
           <a:p>
-            <a:pPr indent="0" marL="0">
+            <a:pPr marL="0" indent="0">
               <a:buNone/>
             </a:pPr>
             <a:r>
@@ -3996,6 +3972,7 @@
         <a:solidFill>
           <a:srgbClr val="0D1117"/>
         </a:solidFill>
+        <a:effectLst/>
       </p:bgPr>
     </p:bg>
     <p:spTree>
@@ -4033,7 +4010,7 @@
           <a:bodyPr wrap="square" rtlCol="0" anchor="ctr"/>
           <a:lstStyle/>
           <a:p>
-            <a:pPr indent="0" marL="0">
+            <a:pPr marL="0" indent="0">
               <a:buNone/>
             </a:pPr>
             <a:r>
@@ -4072,7 +4049,7 @@
           <a:bodyPr wrap="square" rtlCol="0" anchor="ctr"/>
           <a:lstStyle/>
           <a:p>
-            <a:pPr indent="0" marL="0">
+            <a:pPr marL="0" indent="0">
               <a:buNone/>
             </a:pPr>
             <a:r>
@@ -4111,6 +4088,13 @@
             <a:prstDash val="solid"/>
           </a:ln>
         </p:spPr>
+        <p:txBody>
+          <a:bodyPr/>
+          <a:lstStyle/>
+          <a:p>
+            <a:endParaRPr lang="en-US"/>
+          </a:p>
+        </p:txBody>
       </p:sp>
       <p:sp>
         <p:nvSpPr>
@@ -4131,6 +4115,13 @@
           </a:solidFill>
           <a:ln/>
         </p:spPr>
+        <p:txBody>
+          <a:bodyPr/>
+          <a:lstStyle/>
+          <a:p>
+            <a:endParaRPr lang="en-US"/>
+          </a:p>
+        </p:txBody>
       </p:sp>
       <p:sp>
         <p:nvSpPr>
@@ -4153,7 +4144,7 @@
           <a:bodyPr wrap="square" rtlCol="0" anchor="t"/>
           <a:lstStyle/>
           <a:p>
-            <a:pPr indent="0" marL="0">
+            <a:pPr marL="0" indent="0">
               <a:buNone/>
             </a:pPr>
             <a:r>
@@ -4170,7 +4161,7 @@
             <a:endParaRPr lang="en-US" sz="900" dirty="0"/>
           </a:p>
           <a:p>
-            <a:pPr indent="0" marL="0">
+            <a:pPr marL="0" indent="0">
               <a:buNone/>
             </a:pPr>
             <a:r>
@@ -4187,7 +4178,7 @@
             <a:endParaRPr lang="en-US" sz="900" dirty="0"/>
           </a:p>
           <a:p>
-            <a:pPr indent="0" marL="0">
+            <a:pPr marL="0" indent="0">
               <a:buNone/>
             </a:pPr>
             <a:r>
@@ -4204,7 +4195,7 @@
             <a:endParaRPr lang="en-US" sz="900" dirty="0"/>
           </a:p>
           <a:p>
-            <a:pPr indent="0" marL="0">
+            <a:pPr marL="0" indent="0">
               <a:buNone/>
             </a:pPr>
             <a:r>
@@ -4221,13 +4212,13 @@
             <a:endParaRPr lang="en-US" sz="900" dirty="0"/>
           </a:p>
           <a:p>
-            <a:pPr indent="0" marL="0">
-              <a:buNone/>
-            </a:pPr>
-            <a:endParaRPr lang="en-US" sz="900" dirty="0"/>
-          </a:p>
-          <a:p>
-            <a:pPr indent="0" marL="0">
+            <a:pPr marL="0" indent="0">
+              <a:buNone/>
+            </a:pPr>
+            <a:endParaRPr lang="en-US" sz="900" dirty="0"/>
+          </a:p>
+          <a:p>
+            <a:pPr marL="0" indent="0">
               <a:buNone/>
             </a:pPr>
             <a:r>
@@ -4244,7 +4235,7 @@
             <a:endParaRPr lang="en-US" sz="900" dirty="0"/>
           </a:p>
           <a:p>
-            <a:pPr indent="0" marL="0">
+            <a:pPr marL="0" indent="0">
               <a:buNone/>
             </a:pPr>
             <a:r>
@@ -4283,7 +4274,7 @@
           <a:bodyPr wrap="square" rtlCol="0" anchor="ctr"/>
           <a:lstStyle/>
           <a:p>
-            <a:pPr indent="0" marL="0">
+            <a:pPr marL="0" indent="0">
               <a:buNone/>
             </a:pPr>
             <a:r>
@@ -4322,6 +4313,13 @@
             <a:prstDash val="solid"/>
           </a:ln>
         </p:spPr>
+        <p:txBody>
+          <a:bodyPr/>
+          <a:lstStyle/>
+          <a:p>
+            <a:endParaRPr lang="en-US"/>
+          </a:p>
+        </p:txBody>
       </p:sp>
       <p:sp>
         <p:nvSpPr>
@@ -4342,6 +4340,13 @@
           </a:solidFill>
           <a:ln/>
         </p:spPr>
+        <p:txBody>
+          <a:bodyPr/>
+          <a:lstStyle/>
+          <a:p>
+            <a:endParaRPr lang="en-US"/>
+          </a:p>
+        </p:txBody>
       </p:sp>
       <p:sp>
         <p:nvSpPr>
@@ -4364,7 +4369,7 @@
           <a:bodyPr wrap="square" rtlCol="0" anchor="t"/>
           <a:lstStyle/>
           <a:p>
-            <a:pPr indent="0" marL="0">
+            <a:pPr marL="0" indent="0">
               <a:buNone/>
             </a:pPr>
             <a:r>
@@ -4381,7 +4386,7 @@
             <a:endParaRPr lang="en-US" sz="900" dirty="0"/>
           </a:p>
           <a:p>
-            <a:pPr indent="0" marL="0">
+            <a:pPr marL="0" indent="0">
               <a:buNone/>
             </a:pPr>
             <a:r>
@@ -4398,7 +4403,7 @@
             <a:endParaRPr lang="en-US" sz="900" dirty="0"/>
           </a:p>
           <a:p>
-            <a:pPr indent="0" marL="0">
+            <a:pPr marL="0" indent="0">
               <a:buNone/>
             </a:pPr>
             <a:r>
@@ -4415,7 +4420,7 @@
             <a:endParaRPr lang="en-US" sz="900" dirty="0"/>
           </a:p>
           <a:p>
-            <a:pPr indent="0" marL="0">
+            <a:pPr marL="0" indent="0">
               <a:buNone/>
             </a:pPr>
             <a:r>
@@ -4432,7 +4437,7 @@
             <a:endParaRPr lang="en-US" sz="900" dirty="0"/>
           </a:p>
           <a:p>
-            <a:pPr indent="0" marL="0">
+            <a:pPr marL="0" indent="0">
               <a:buNone/>
             </a:pPr>
             <a:r>
@@ -4471,7 +4476,7 @@
           <a:bodyPr wrap="square" rtlCol="0" anchor="ctr"/>
           <a:lstStyle/>
           <a:p>
-            <a:pPr indent="0" marL="0">
+            <a:pPr marL="0" indent="0">
               <a:buNone/>
             </a:pPr>
             <a:r>
@@ -4505,6 +4510,13 @@
           </a:solidFill>
           <a:ln/>
         </p:spPr>
+        <p:txBody>
+          <a:bodyPr/>
+          <a:lstStyle/>
+          <a:p>
+            <a:endParaRPr lang="en-US"/>
+          </a:p>
+        </p:txBody>
       </p:sp>
       <p:sp>
         <p:nvSpPr>
@@ -4527,7 +4539,7 @@
           <a:bodyPr wrap="square" rtlCol="0" anchor="ctr"/>
           <a:lstStyle/>
           <a:p>
-            <a:pPr indent="0" marL="0">
+            <a:pPr marL="0" indent="0">
               <a:buNone/>
             </a:pPr>
             <a:r>
@@ -4561,6 +4573,13 @@
           </a:solidFill>
           <a:ln/>
         </p:spPr>
+        <p:txBody>
+          <a:bodyPr/>
+          <a:lstStyle/>
+          <a:p>
+            <a:endParaRPr lang="en-US"/>
+          </a:p>
+        </p:txBody>
       </p:sp>
       <p:sp>
         <p:nvSpPr>
@@ -4583,7 +4602,7 @@
           <a:bodyPr wrap="square" rtlCol="0" anchor="ctr"/>
           <a:lstStyle/>
           <a:p>
-            <a:pPr indent="0" marL="0">
+            <a:pPr marL="0" indent="0">
               <a:buNone/>
             </a:pPr>
             <a:r>
@@ -4617,6 +4636,13 @@
           </a:solidFill>
           <a:ln/>
         </p:spPr>
+        <p:txBody>
+          <a:bodyPr/>
+          <a:lstStyle/>
+          <a:p>
+            <a:endParaRPr lang="en-US"/>
+          </a:p>
+        </p:txBody>
       </p:sp>
       <p:sp>
         <p:nvSpPr>
@@ -4639,7 +4665,7 @@
           <a:bodyPr wrap="square" rtlCol="0" anchor="ctr"/>
           <a:lstStyle/>
           <a:p>
-            <a:pPr indent="0" marL="0">
+            <a:pPr marL="0" indent="0">
               <a:buNone/>
             </a:pPr>
             <a:r>
@@ -4673,6 +4699,13 @@
           </a:solidFill>
           <a:ln/>
         </p:spPr>
+        <p:txBody>
+          <a:bodyPr/>
+          <a:lstStyle/>
+          <a:p>
+            <a:endParaRPr lang="en-US"/>
+          </a:p>
+        </p:txBody>
       </p:sp>
       <p:sp>
         <p:nvSpPr>
@@ -4695,7 +4728,7 @@
           <a:bodyPr wrap="square" rtlCol="0" anchor="ctr"/>
           <a:lstStyle/>
           <a:p>
-            <a:pPr indent="0" marL="0">
+            <a:pPr marL="0" indent="0">
               <a:buNone/>
             </a:pPr>
             <a:r>
@@ -4729,6 +4762,13 @@
           </a:solidFill>
           <a:ln/>
         </p:spPr>
+        <p:txBody>
+          <a:bodyPr/>
+          <a:lstStyle/>
+          <a:p>
+            <a:endParaRPr lang="en-US"/>
+          </a:p>
+        </p:txBody>
       </p:sp>
       <p:sp>
         <p:nvSpPr>
@@ -4751,7 +4791,7 @@
           <a:bodyPr wrap="square" rtlCol="0" anchor="ctr"/>
           <a:lstStyle/>
           <a:p>
-            <a:pPr indent="0" marL="0">
+            <a:pPr marL="0" indent="0">
               <a:buNone/>
             </a:pPr>
             <a:r>
@@ -4785,6 +4825,13 @@
           </a:solidFill>
           <a:ln/>
         </p:spPr>
+        <p:txBody>
+          <a:bodyPr/>
+          <a:lstStyle/>
+          <a:p>
+            <a:endParaRPr lang="en-US"/>
+          </a:p>
+        </p:txBody>
       </p:sp>
       <p:sp>
         <p:nvSpPr>
@@ -4807,7 +4854,7 @@
           <a:bodyPr wrap="square" rtlCol="0" anchor="ctr"/>
           <a:lstStyle/>
           <a:p>
-            <a:pPr indent="0" marL="0">
+            <a:pPr marL="0" indent="0">
               <a:buNone/>
             </a:pPr>
             <a:r>
@@ -4841,6 +4888,13 @@
           </a:solidFill>
           <a:ln/>
         </p:spPr>
+        <p:txBody>
+          <a:bodyPr/>
+          <a:lstStyle/>
+          <a:p>
+            <a:endParaRPr lang="en-US"/>
+          </a:p>
+        </p:txBody>
       </p:sp>
       <p:sp>
         <p:nvSpPr>
@@ -4863,7 +4917,7 @@
           <a:bodyPr wrap="square" rtlCol="0" anchor="ctr"/>
           <a:lstStyle/>
           <a:p>
-            <a:pPr indent="0" marL="0">
+            <a:pPr marL="0" indent="0">
               <a:buNone/>
             </a:pPr>
             <a:r>
@@ -4897,6 +4951,13 @@
           </a:solidFill>
           <a:ln/>
         </p:spPr>
+        <p:txBody>
+          <a:bodyPr/>
+          <a:lstStyle/>
+          <a:p>
+            <a:endParaRPr lang="en-US"/>
+          </a:p>
+        </p:txBody>
       </p:sp>
       <p:sp>
         <p:nvSpPr>
@@ -4919,7 +4980,7 @@
           <a:bodyPr wrap="square" rtlCol="0" anchor="ctr"/>
           <a:lstStyle/>
           <a:p>
-            <a:pPr indent="0" marL="0">
+            <a:pPr marL="0" indent="0">
               <a:buNone/>
             </a:pPr>
             <a:r>
@@ -4955,7 +5016,7 @@
           <a:bodyPr wrap="square" rtlCol="0" anchor="ctr"/>
           <a:lstStyle/>
           <a:p>
-            <a:pPr indent="0" marL="0">
+            <a:pPr marL="0" indent="0">
               <a:buNone/>
             </a:pPr>
             <a:r>
@@ -4994,6 +5055,13 @@
             <a:prstDash val="solid"/>
           </a:ln>
         </p:spPr>
+        <p:txBody>
+          <a:bodyPr/>
+          <a:lstStyle/>
+          <a:p>
+            <a:endParaRPr lang="en-US"/>
+          </a:p>
+        </p:txBody>
       </p:sp>
       <p:sp>
         <p:nvSpPr>
@@ -5014,6 +5082,13 @@
           </a:solidFill>
           <a:ln/>
         </p:spPr>
+        <p:txBody>
+          <a:bodyPr/>
+          <a:lstStyle/>
+          <a:p>
+            <a:endParaRPr lang="en-US"/>
+          </a:p>
+        </p:txBody>
       </p:sp>
       <p:sp>
         <p:nvSpPr>
@@ -5036,7 +5111,7 @@
           <a:bodyPr wrap="square" rtlCol="0" anchor="t"/>
           <a:lstStyle/>
           <a:p>
-            <a:pPr indent="0" marL="0">
+            <a:pPr marL="0" indent="0">
               <a:buNone/>
             </a:pPr>
             <a:r>
@@ -5053,7 +5128,7 @@
             <a:endParaRPr lang="en-US" sz="900" dirty="0"/>
           </a:p>
           <a:p>
-            <a:pPr indent="0" marL="0">
+            <a:pPr marL="0" indent="0">
               <a:buNone/>
             </a:pPr>
             <a:r>
@@ -5070,7 +5145,7 @@
             <a:endParaRPr lang="en-US" sz="900" dirty="0"/>
           </a:p>
           <a:p>
-            <a:pPr indent="0" marL="0">
+            <a:pPr marL="0" indent="0">
               <a:buNone/>
             </a:pPr>
             <a:r>
@@ -5104,6 +5179,7 @@
         <a:solidFill>
           <a:srgbClr val="0D1117"/>
         </a:solidFill>
+        <a:effectLst/>
       </p:bgPr>
     </p:bg>
     <p:spTree>
@@ -5141,7 +5217,7 @@
           <a:bodyPr wrap="square" rtlCol="0" anchor="ctr"/>
           <a:lstStyle/>
           <a:p>
-            <a:pPr indent="0" marL="0">
+            <a:pPr marL="0" indent="0">
               <a:buNone/>
             </a:pPr>
             <a:r>
@@ -5178,6 +5254,13 @@
           </a:solidFill>
           <a:ln/>
         </p:spPr>
+        <p:txBody>
+          <a:bodyPr/>
+          <a:lstStyle/>
+          <a:p>
+            <a:endParaRPr lang="en-US"/>
+          </a:p>
+        </p:txBody>
       </p:sp>
       <p:sp>
         <p:nvSpPr>
@@ -5198,6 +5281,13 @@
           </a:solidFill>
           <a:ln/>
         </p:spPr>
+        <p:txBody>
+          <a:bodyPr/>
+          <a:lstStyle/>
+          <a:p>
+            <a:endParaRPr lang="en-US"/>
+          </a:p>
+        </p:txBody>
       </p:sp>
       <p:sp>
         <p:nvSpPr>
@@ -5220,7 +5310,7 @@
           <a:bodyPr wrap="square" rtlCol="0" anchor="ctr"/>
           <a:lstStyle/>
           <a:p>
-            <a:pPr indent="0" marL="0">
+            <a:pPr marL="0" indent="0">
               <a:buNone/>
             </a:pPr>
             <a:r>
@@ -5256,7 +5346,7 @@
           <a:bodyPr wrap="square" rtlCol="0" anchor="ctr"/>
           <a:lstStyle/>
           <a:p>
-            <a:pPr indent="0" marL="0">
+            <a:pPr marL="0" indent="0">
               <a:buNone/>
             </a:pPr>
             <a:r>
@@ -5290,6 +5380,13 @@
           </a:solidFill>
           <a:ln/>
         </p:spPr>
+        <p:txBody>
+          <a:bodyPr/>
+          <a:lstStyle/>
+          <a:p>
+            <a:endParaRPr lang="en-US"/>
+          </a:p>
+        </p:txBody>
       </p:sp>
       <p:sp>
         <p:nvSpPr>
@@ -5310,6 +5407,13 @@
           </a:solidFill>
           <a:ln/>
         </p:spPr>
+        <p:txBody>
+          <a:bodyPr/>
+          <a:lstStyle/>
+          <a:p>
+            <a:endParaRPr lang="en-US"/>
+          </a:p>
+        </p:txBody>
       </p:sp>
       <p:sp>
         <p:nvSpPr>
@@ -5332,7 +5436,7 @@
           <a:bodyPr wrap="square" rtlCol="0" anchor="ctr"/>
           <a:lstStyle/>
           <a:p>
-            <a:pPr indent="0" marL="0">
+            <a:pPr marL="0" indent="0">
               <a:buNone/>
             </a:pPr>
             <a:r>
@@ -5368,7 +5472,7 @@
           <a:bodyPr wrap="square" rtlCol="0" anchor="ctr"/>
           <a:lstStyle/>
           <a:p>
-            <a:pPr indent="0" marL="0">
+            <a:pPr marL="0" indent="0">
               <a:buNone/>
             </a:pPr>
             <a:r>
@@ -5402,6 +5506,13 @@
           </a:solidFill>
           <a:ln/>
         </p:spPr>
+        <p:txBody>
+          <a:bodyPr/>
+          <a:lstStyle/>
+          <a:p>
+            <a:endParaRPr lang="en-US"/>
+          </a:p>
+        </p:txBody>
       </p:sp>
       <p:sp>
         <p:nvSpPr>
@@ -5422,6 +5533,13 @@
           </a:solidFill>
           <a:ln/>
         </p:spPr>
+        <p:txBody>
+          <a:bodyPr/>
+          <a:lstStyle/>
+          <a:p>
+            <a:endParaRPr lang="en-US"/>
+          </a:p>
+        </p:txBody>
       </p:sp>
       <p:sp>
         <p:nvSpPr>
@@ -5444,7 +5562,7 @@
           <a:bodyPr wrap="square" rtlCol="0" anchor="ctr"/>
           <a:lstStyle/>
           <a:p>
-            <a:pPr indent="0" marL="0">
+            <a:pPr marL="0" indent="0">
               <a:buNone/>
             </a:pPr>
             <a:r>
@@ -5480,7 +5598,7 @@
           <a:bodyPr wrap="square" rtlCol="0" anchor="ctr"/>
           <a:lstStyle/>
           <a:p>
-            <a:pPr indent="0" marL="0">
+            <a:pPr marL="0" indent="0">
               <a:buNone/>
             </a:pPr>
             <a:r>
@@ -5514,6 +5632,13 @@
           </a:solidFill>
           <a:ln/>
         </p:spPr>
+        <p:txBody>
+          <a:bodyPr/>
+          <a:lstStyle/>
+          <a:p>
+            <a:endParaRPr lang="en-US"/>
+          </a:p>
+        </p:txBody>
       </p:sp>
       <p:sp>
         <p:nvSpPr>
@@ -5534,6 +5659,13 @@
           </a:solidFill>
           <a:ln/>
         </p:spPr>
+        <p:txBody>
+          <a:bodyPr/>
+          <a:lstStyle/>
+          <a:p>
+            <a:endParaRPr lang="en-US"/>
+          </a:p>
+        </p:txBody>
       </p:sp>
       <p:sp>
         <p:nvSpPr>
@@ -5556,7 +5688,7 @@
           <a:bodyPr wrap="square" rtlCol="0" anchor="ctr"/>
           <a:lstStyle/>
           <a:p>
-            <a:pPr indent="0" marL="0">
+            <a:pPr marL="0" indent="0">
               <a:buNone/>
             </a:pPr>
             <a:r>
@@ -5592,7 +5724,7 @@
           <a:bodyPr wrap="square" rtlCol="0" anchor="ctr"/>
           <a:lstStyle/>
           <a:p>
-            <a:pPr indent="0" marL="0">
+            <a:pPr marL="0" indent="0">
               <a:buNone/>
             </a:pPr>
             <a:r>
@@ -5626,6 +5758,13 @@
           </a:solidFill>
           <a:ln/>
         </p:spPr>
+        <p:txBody>
+          <a:bodyPr/>
+          <a:lstStyle/>
+          <a:p>
+            <a:endParaRPr lang="en-US"/>
+          </a:p>
+        </p:txBody>
       </p:sp>
       <p:sp>
         <p:nvSpPr>
@@ -5646,6 +5785,13 @@
           </a:solidFill>
           <a:ln/>
         </p:spPr>
+        <p:txBody>
+          <a:bodyPr/>
+          <a:lstStyle/>
+          <a:p>
+            <a:endParaRPr lang="en-US"/>
+          </a:p>
+        </p:txBody>
       </p:sp>
       <p:sp>
         <p:nvSpPr>
@@ -5668,7 +5814,7 @@
           <a:bodyPr wrap="square" rtlCol="0" anchor="ctr"/>
           <a:lstStyle/>
           <a:p>
-            <a:pPr indent="0" marL="0">
+            <a:pPr marL="0" indent="0">
               <a:buNone/>
             </a:pPr>
             <a:r>
@@ -5704,7 +5850,7 @@
           <a:bodyPr wrap="square" rtlCol="0" anchor="ctr"/>
           <a:lstStyle/>
           <a:p>
-            <a:pPr indent="0" marL="0">
+            <a:pPr marL="0" indent="0">
               <a:buNone/>
             </a:pPr>
             <a:r>
@@ -5738,6 +5884,13 @@
           </a:solidFill>
           <a:ln/>
         </p:spPr>
+        <p:txBody>
+          <a:bodyPr/>
+          <a:lstStyle/>
+          <a:p>
+            <a:endParaRPr lang="en-US"/>
+          </a:p>
+        </p:txBody>
       </p:sp>
       <p:sp>
         <p:nvSpPr>
@@ -5758,6 +5911,13 @@
           </a:solidFill>
           <a:ln/>
         </p:spPr>
+        <p:txBody>
+          <a:bodyPr/>
+          <a:lstStyle/>
+          <a:p>
+            <a:endParaRPr lang="en-US"/>
+          </a:p>
+        </p:txBody>
       </p:sp>
       <p:sp>
         <p:nvSpPr>
@@ -5780,7 +5940,7 @@
           <a:bodyPr wrap="square" rtlCol="0" anchor="ctr"/>
           <a:lstStyle/>
           <a:p>
-            <a:pPr indent="0" marL="0">
+            <a:pPr marL="0" indent="0">
               <a:buNone/>
             </a:pPr>
             <a:r>
@@ -5816,7 +5976,7 @@
           <a:bodyPr wrap="square" rtlCol="0" anchor="ctr"/>
           <a:lstStyle/>
           <a:p>
-            <a:pPr indent="0" marL="0">
+            <a:pPr marL="0" indent="0">
               <a:buNone/>
             </a:pPr>
             <a:r>
@@ -5852,7 +6012,7 @@
           <a:bodyPr wrap="square" rtlCol="0" anchor="ctr"/>
           <a:lstStyle/>
           <a:p>
-            <a:pPr algn="ctr" indent="0" marL="0">
+            <a:pPr marL="0" indent="0" algn="ctr">
               <a:buNone/>
             </a:pPr>
             <a:r>
@@ -6171,4 +6331,319 @@
     </a:ext>
   </a:extLst>
 </a:theme>
+</file>
+
+<file path=ppt/theme/theme2.xml><?xml version="1.0" encoding="utf-8"?>
+<a:theme xmlns:a="http://schemas.openxmlformats.org/drawingml/2006/main" name="Office Theme">
+  <a:themeElements>
+    <a:clrScheme name="Office">
+      <a:dk1>
+        <a:sysClr val="windowText" lastClr="000000"/>
+      </a:dk1>
+      <a:lt1>
+        <a:sysClr val="window" lastClr="FFFFFF"/>
+      </a:lt1>
+      <a:dk2>
+        <a:srgbClr val="0E2841"/>
+      </a:dk2>
+      <a:lt2>
+        <a:srgbClr val="E8E8E8"/>
+      </a:lt2>
+      <a:accent1>
+        <a:srgbClr val="156082"/>
+      </a:accent1>
+      <a:accent2>
+        <a:srgbClr val="E97132"/>
+      </a:accent2>
+      <a:accent3>
+        <a:srgbClr val="196B24"/>
+      </a:accent3>
+      <a:accent4>
+        <a:srgbClr val="0F9ED5"/>
+      </a:accent4>
+      <a:accent5>
+        <a:srgbClr val="A02B93"/>
+      </a:accent5>
+      <a:accent6>
+        <a:srgbClr val="4EA72E"/>
+      </a:accent6>
+      <a:hlink>
+        <a:srgbClr val="467886"/>
+      </a:hlink>
+      <a:folHlink>
+        <a:srgbClr val="96607D"/>
+      </a:folHlink>
+    </a:clrScheme>
+    <a:fontScheme name="Office">
+      <a:majorFont>
+        <a:latin typeface="Aptos Display" panose="02110004020202020204"/>
+        <a:ea typeface=""/>
+        <a:cs typeface=""/>
+        <a:font script="Jpan" typeface="游ゴシック Light"/>
+        <a:font script="Hang" typeface="맑은 고딕"/>
+        <a:font script="Hans" typeface="等线 Light"/>
+        <a:font script="Hant" typeface="新細明體"/>
+        <a:font script="Arab" typeface="Times New Roman"/>
+        <a:font script="Hebr" typeface="Times New Roman"/>
+        <a:font script="Thai" typeface="Angsana New"/>
+        <a:font script="Ethi" typeface="Nyala"/>
+        <a:font script="Beng" typeface="Vrinda"/>
+        <a:font script="Gujr" typeface="Shruti"/>
+        <a:font script="Khmr" typeface="MoolBoran"/>
+        <a:font script="Knda" typeface="Tunga"/>
+        <a:font script="Guru" typeface="Raavi"/>
+        <a:font script="Cans" typeface="Euphemia"/>
+        <a:font script="Cher" typeface="Plantagenet Cherokee"/>
+        <a:font script="Yiii" typeface="Microsoft Yi Baiti"/>
+        <a:font script="Tibt" typeface="Microsoft Himalaya"/>
+        <a:font script="Thaa" typeface="MV Boli"/>
+        <a:font script="Deva" typeface="Mangal"/>
+        <a:font script="Telu" typeface="Gautami"/>
+        <a:font script="Taml" typeface="Latha"/>
+        <a:font script="Syrc" typeface="Estrangelo Edessa"/>
+        <a:font script="Orya" typeface="Kalinga"/>
+        <a:font script="Mlym" typeface="Kartika"/>
+        <a:font script="Laoo" typeface="DokChampa"/>
+        <a:font script="Sinh" typeface="Iskoola Pota"/>
+        <a:font script="Mong" typeface="Mongolian Baiti"/>
+        <a:font script="Viet" typeface="Times New Roman"/>
+        <a:font script="Uigh" typeface="Microsoft Uighur"/>
+        <a:font script="Geor" typeface="Sylfaen"/>
+        <a:font script="Armn" typeface="Arial"/>
+        <a:font script="Bugi" typeface="Leelawadee UI"/>
+        <a:font script="Bopo" typeface="Microsoft JhengHei"/>
+        <a:font script="Java" typeface="Javanese Text"/>
+        <a:font script="Lisu" typeface="Segoe UI"/>
+        <a:font script="Mymr" typeface="Myanmar Text"/>
+        <a:font script="Nkoo" typeface="Ebrima"/>
+        <a:font script="Olck" typeface="Nirmala UI"/>
+        <a:font script="Osma" typeface="Ebrima"/>
+        <a:font script="Phag" typeface="Phagspa"/>
+        <a:font script="Syrn" typeface="Estrangelo Edessa"/>
+        <a:font script="Syrj" typeface="Estrangelo Edessa"/>
+        <a:font script="Syre" typeface="Estrangelo Edessa"/>
+        <a:font script="Sora" typeface="Nirmala UI"/>
+        <a:font script="Tale" typeface="Microsoft Tai Le"/>
+        <a:font script="Talu" typeface="Microsoft New Tai Lue"/>
+        <a:font script="Tfng" typeface="Ebrima"/>
+      </a:majorFont>
+      <a:minorFont>
+        <a:latin typeface="Aptos" panose="02110004020202020204"/>
+        <a:ea typeface=""/>
+        <a:cs typeface=""/>
+        <a:font script="Jpan" typeface="游ゴシック"/>
+        <a:font script="Hang" typeface="맑은 고딕"/>
+        <a:font script="Hans" typeface="等线"/>
+        <a:font script="Hant" typeface="新細明體"/>
+        <a:font script="Arab" typeface="Arial"/>
+        <a:font script="Hebr" typeface="Arial"/>
+        <a:font script="Thai" typeface="Cordia New"/>
+        <a:font script="Ethi" typeface="Nyala"/>
+        <a:font script="Beng" typeface="Vrinda"/>
+        <a:font script="Gujr" typeface="Shruti"/>
+        <a:font script="Khmr" typeface="DaunPenh"/>
+        <a:font script="Knda" typeface="Tunga"/>
+        <a:font script="Guru" typeface="Raavi"/>
+        <a:font script="Cans" typeface="Euphemia"/>
+        <a:font script="Cher" typeface="Plantagenet Cherokee"/>
+        <a:font script="Yiii" typeface="Microsoft Yi Baiti"/>
+        <a:font script="Tibt" typeface="Microsoft Himalaya"/>
+        <a:font script="Thaa" typeface="MV Boli"/>
+        <a:font script="Deva" typeface="Mangal"/>
+        <a:font script="Telu" typeface="Gautami"/>
+        <a:font script="Taml" typeface="Latha"/>
+        <a:font script="Syrc" typeface="Estrangelo Edessa"/>
+        <a:font script="Orya" typeface="Kalinga"/>
+        <a:font script="Mlym" typeface="Kartika"/>
+        <a:font script="Laoo" typeface="DokChampa"/>
+        <a:font script="Sinh" typeface="Iskoola Pota"/>
+        <a:font script="Mong" typeface="Mongolian Baiti"/>
+        <a:font script="Viet" typeface="Arial"/>
+        <a:font script="Uigh" typeface="Microsoft Uighur"/>
+        <a:font script="Geor" typeface="Sylfaen"/>
+        <a:font script="Armn" typeface="Arial"/>
+        <a:font script="Bugi" typeface="Leelawadee UI"/>
+        <a:font script="Bopo" typeface="Microsoft JhengHei"/>
+        <a:font script="Java" typeface="Javanese Text"/>
+        <a:font script="Lisu" typeface="Segoe UI"/>
+        <a:font script="Mymr" typeface="Myanmar Text"/>
+        <a:font script="Nkoo" typeface="Ebrima"/>
+        <a:font script="Olck" typeface="Nirmala UI"/>
+        <a:font script="Osma" typeface="Ebrima"/>
+        <a:font script="Phag" typeface="Phagspa"/>
+        <a:font script="Syrn" typeface="Estrangelo Edessa"/>
+        <a:font script="Syrj" typeface="Estrangelo Edessa"/>
+        <a:font script="Syre" typeface="Estrangelo Edessa"/>
+        <a:font script="Sora" typeface="Nirmala UI"/>
+        <a:font script="Tale" typeface="Microsoft Tai Le"/>
+        <a:font script="Talu" typeface="Microsoft New Tai Lue"/>
+        <a:font script="Tfng" typeface="Ebrima"/>
+      </a:minorFont>
+    </a:fontScheme>
+    <a:fmtScheme name="Office">
+      <a:fillStyleLst>
+        <a:solidFill>
+          <a:schemeClr val="phClr"/>
+        </a:solidFill>
+        <a:gradFill rotWithShape="1">
+          <a:gsLst>
+            <a:gs pos="0">
+              <a:schemeClr val="phClr">
+                <a:lumMod val="110000"/>
+                <a:satMod val="105000"/>
+                <a:tint val="67000"/>
+              </a:schemeClr>
+            </a:gs>
+            <a:gs pos="50000">
+              <a:schemeClr val="phClr">
+                <a:lumMod val="105000"/>
+                <a:satMod val="103000"/>
+                <a:tint val="73000"/>
+              </a:schemeClr>
+            </a:gs>
+            <a:gs pos="100000">
+              <a:schemeClr val="phClr">
+                <a:lumMod val="105000"/>
+                <a:satMod val="109000"/>
+                <a:tint val="81000"/>
+              </a:schemeClr>
+            </a:gs>
+          </a:gsLst>
+          <a:lin ang="5400000" scaled="0"/>
+        </a:gradFill>
+        <a:gradFill rotWithShape="1">
+          <a:gsLst>
+            <a:gs pos="0">
+              <a:schemeClr val="phClr">
+                <a:satMod val="103000"/>
+                <a:lumMod val="102000"/>
+                <a:tint val="94000"/>
+              </a:schemeClr>
+            </a:gs>
+            <a:gs pos="50000">
+              <a:schemeClr val="phClr">
+                <a:satMod val="110000"/>
+                <a:lumMod val="100000"/>
+                <a:shade val="100000"/>
+              </a:schemeClr>
+            </a:gs>
+            <a:gs pos="100000">
+              <a:schemeClr val="phClr">
+                <a:lumMod val="99000"/>
+                <a:satMod val="120000"/>
+                <a:shade val="78000"/>
+              </a:schemeClr>
+            </a:gs>
+          </a:gsLst>
+          <a:lin ang="5400000" scaled="0"/>
+        </a:gradFill>
+      </a:fillStyleLst>
+      <a:lnStyleLst>
+        <a:ln w="12700" cap="flat" cmpd="sng" algn="ctr">
+          <a:solidFill>
+            <a:schemeClr val="phClr"/>
+          </a:solidFill>
+          <a:prstDash val="solid"/>
+          <a:miter lim="800000"/>
+        </a:ln>
+        <a:ln w="19050" cap="flat" cmpd="sng" algn="ctr">
+          <a:solidFill>
+            <a:schemeClr val="phClr"/>
+          </a:solidFill>
+          <a:prstDash val="solid"/>
+          <a:miter lim="800000"/>
+        </a:ln>
+        <a:ln w="25400" cap="flat" cmpd="sng" algn="ctr">
+          <a:solidFill>
+            <a:schemeClr val="phClr"/>
+          </a:solidFill>
+          <a:prstDash val="solid"/>
+          <a:miter lim="800000"/>
+        </a:ln>
+      </a:lnStyleLst>
+      <a:effectStyleLst>
+        <a:effectStyle>
+          <a:effectLst/>
+        </a:effectStyle>
+        <a:effectStyle>
+          <a:effectLst/>
+        </a:effectStyle>
+        <a:effectStyle>
+          <a:effectLst>
+            <a:outerShdw blurRad="57150" dist="19050" dir="5400000" algn="ctr" rotWithShape="0">
+              <a:srgbClr val="000000">
+                <a:alpha val="63000"/>
+              </a:srgbClr>
+            </a:outerShdw>
+          </a:effectLst>
+        </a:effectStyle>
+      </a:effectStyleLst>
+      <a:bgFillStyleLst>
+        <a:solidFill>
+          <a:schemeClr val="phClr"/>
+        </a:solidFill>
+        <a:solidFill>
+          <a:schemeClr val="phClr">
+            <a:tint val="95000"/>
+            <a:satMod val="170000"/>
+          </a:schemeClr>
+        </a:solidFill>
+        <a:gradFill rotWithShape="1">
+          <a:gsLst>
+            <a:gs pos="0">
+              <a:schemeClr val="phClr">
+                <a:tint val="93000"/>
+                <a:satMod val="150000"/>
+                <a:shade val="98000"/>
+                <a:lumMod val="102000"/>
+              </a:schemeClr>
+            </a:gs>
+            <a:gs pos="50000">
+              <a:schemeClr val="phClr">
+                <a:tint val="98000"/>
+                <a:satMod val="130000"/>
+                <a:shade val="90000"/>
+                <a:lumMod val="103000"/>
+              </a:schemeClr>
+            </a:gs>
+            <a:gs pos="100000">
+              <a:schemeClr val="phClr">
+                <a:shade val="63000"/>
+                <a:satMod val="120000"/>
+              </a:schemeClr>
+            </a:gs>
+          </a:gsLst>
+          <a:lin ang="5400000" scaled="0"/>
+        </a:gradFill>
+      </a:bgFillStyleLst>
+    </a:fmtScheme>
+  </a:themeElements>
+  <a:objectDefaults>
+    <a:lnDef>
+      <a:spPr/>
+      <a:bodyPr/>
+      <a:lstStyle/>
+      <a:style>
+        <a:lnRef idx="2">
+          <a:schemeClr val="accent1"/>
+        </a:lnRef>
+        <a:fillRef idx="0">
+          <a:schemeClr val="accent1"/>
+        </a:fillRef>
+        <a:effectRef idx="1">
+          <a:schemeClr val="accent1"/>
+        </a:effectRef>
+        <a:fontRef idx="minor">
+          <a:schemeClr val="tx1"/>
+        </a:fontRef>
+      </a:style>
+    </a:lnDef>
+  </a:objectDefaults>
+  <a:extraClrSchemeLst/>
+  <a:extLst>
+    <a:ext uri="{05A4C25C-085E-4340-85A3-A5531E510DB2}">
+      <thm15:themeFamily xmlns:thm15="http://schemas.microsoft.com/office/thememl/2012/main" name="Office Theme" id="{2E142A2C-CD16-42D6-873A-C26D2A0506FA}" vid="{1BDDFF52-6CD6-40A5-AB3C-68EB2F1E4D0A}"/>
+    </a:ext>
+  </a:extLst>
+</a:theme>
 </file>